--- a/GoScheme_Expo.pptx
+++ b/GoScheme_Expo.pptx
@@ -17122,7 +17122,7 @@
                 <a:latin typeface="Arial"/>
                 <a:cs typeface="Arial"/>
               </a:rPr>
-              <a:t>Flutter — App framework</a:t>
+              <a:t>Capacitor — Android app framework</a:t>
             </a:r>
             <a:r>
               <a:rPr lang="en-US" sz="1200" dirty="0">
@@ -17143,7 +17143,7 @@
                 <a:cs typeface="Arial"/>
                 <a:hlinkClick r:id="rIdL10"/>
               </a:rPr>
-              <a:t>flutter.dev</a:t>
+              <a:t>capacitorjs.com</a:t>
             </a:r>
           </a:p>
           <a:p>
@@ -17164,7 +17164,7 @@
                 <a:latin typeface="Arial"/>
                 <a:cs typeface="Arial"/>
               </a:rPr>
-              <a:t>Google ML Kit — Text recognition</a:t>
+              <a:t>React — App interface</a:t>
             </a:r>
             <a:r>
               <a:rPr lang="en-US" sz="1200" dirty="0">
@@ -17185,7 +17185,7 @@
                 <a:cs typeface="Arial"/>
                 <a:hlinkClick r:id="rIdL11"/>
               </a:rPr>
-              <a:t>developers.google.com/ml-kit</a:t>
+              <a:t>react.dev</a:t>
             </a:r>
           </a:p>
           <a:p>
